--- a/public/fun/pack/pptx/talkpro/발표템플릿프리미엄_47_교육·강의_다크로즈골드.pptx
+++ b/public/fun/pack/pptx/talkpro/발표템플릿프리미엄_47_교육·강의_다크로즈골드.pptx
@@ -115,12 +115,12 @@
   <p:extLst>
     <p:ext uri="{521415D9-36F7-43E2-AB2F-B90AF26B5E84}">
       <p14:sectionLst xmlns:p14="http://schemas.microsoft.com/office/powerpoint/2010/main">
-        <p14:section name="시작" id="{5D97B162-3D63-4196-B35C-1D4CF38D82E4}">
+        <p14:section name="시작" id="{04B158EE-CA5B-4416-B375-72C21C87B005}">
           <p14:sldIdLst>
             <p14:sldId id="256"/>
           </p14:sldIdLst>
         </p14:section>
-        <p14:section name="본문" id="{2D670545-E2AC-4373-AE02-8A418684A4BC}">
+        <p14:section name="본문" id="{E3E51A4D-C976-4418-B98C-B3840C037ED5}">
           <p14:sldIdLst>
             <p14:sldId id="257"/>
             <p14:sldId id="258"/>
@@ -131,7 +131,7 @@
             <p14:sldId id="263"/>
           </p14:sldIdLst>
         </p14:section>
-        <p14:section name="마무리" id="{EA79CB0D-1E99-4245-AF5E-833955C46DD6}">
+        <p14:section name="마무리" id="{A3E5CE8E-3846-45EF-A48C-32F81136291A}">
           <p14:sldIdLst>
             <p14:sldId id="264"/>
           </p14:sldIdLst>
@@ -1964,7 +1964,7 @@
             </a:lvl1pPr>
           </a:lstStyle>
           <a:p>
-            <a:fld id="{599CE1DD-55C5-4626-99B7-9A58FD352A8D}" type="slidenum">
+            <a:fld id="{487999B6-1A10-4F1C-9B1F-209E9B5A3C5A}" type="slidenum">
               <a:rPr lang="en-US"/>
               <a:t>‹#›</a:t>
             </a:fld>
@@ -2635,7 +2635,7 @@
             </a:lvl1pPr>
           </a:lstStyle>
           <a:p>
-            <a:fld id="{0F9E1AF2-4A30-441E-8B10-ED5E4D2C2638}" type="slidenum">
+            <a:fld id="{B807FCC6-F7D0-4139-82C8-1E133E9219B7}" type="slidenum">
               <a:rPr lang="en-US"/>
               <a:t>‹#›</a:t>
             </a:fld>
@@ -3224,7 +3224,7 @@
             </a:lvl1pPr>
           </a:lstStyle>
           <a:p>
-            <a:fld id="{DDE90901-C2A9-4868-8518-7F30303FB96C}" type="slidenum">
+            <a:fld id="{7F0EB906-F78A-4B0C-BE63-44C84F13D768}" type="slidenum">
               <a:rPr lang="en-US"/>
               <a:t>‹#›</a:t>
             </a:fld>
@@ -4055,7 +4055,7 @@
           <a:p>
             <a:r>
               <a:rPr lang="ko-KR"/>
-              <a:t>0000. 00. 00</a:t>
+              <a:t>날짜 입력</a:t>
             </a:r>
           </a:p>
         </p:txBody>
@@ -4140,7 +4140,7 @@
           <a:bodyPr/>
           <a:lstStyle/>
           <a:p>
-            <a:fld id="{D98D3B6C-ABE7-47DF-B3D3-1A0918970868}" type="slidenum">
+            <a:fld id="{D3BB3916-C2C6-4F78-B27C-D761BDF17385}" type="slidenum">
               <a:rPr lang="en-US"/>
               <a:t>‹#›</a:t>
             </a:fld>
@@ -5314,7 +5314,7 @@
           <a:bodyPr/>
           <a:lstStyle/>
           <a:p>
-            <a:fld id="{D5D9654E-A1F9-4A36-9EF6-945099F815CC}" type="slidenum">
+            <a:fld id="{F0BA6D05-9811-423E-8481-8067E0DA0048}" type="slidenum">
               <a:rPr lang="en-US"/>
               <a:t>‹#›</a:t>
             </a:fld>
@@ -5402,7 +5402,7 @@
           <a:bodyPr/>
           <a:lstStyle/>
           <a:p>
-            <a:fld id="{F7319B35-5DB2-46D8-B4C5-6DE6CDCF7E40}" type="slidenum">
+            <a:fld id="{CD19EF37-1683-40CC-B4C7-5C65C29D03D7}" type="slidenum">
               <a:rPr lang="en-US"/>
               <a:t>‹#›</a:t>
             </a:fld>
@@ -6354,7 +6354,7 @@
           <a:bodyPr/>
           <a:lstStyle/>
           <a:p>
-            <a:fld id="{8F346148-CFF5-438D-8A8B-08F3929A1B75}" type="slidenum">
+            <a:fld id="{517DFC3A-5A53-4111-BDFD-50387C0ED188}" type="slidenum">
               <a:rPr lang="en-US"/>
               <a:t>‹#›</a:t>
             </a:fld>
@@ -6956,7 +6956,7 @@
           <a:bodyPr/>
           <a:lstStyle/>
           <a:p>
-            <a:fld id="{A20EE5F2-F355-49A6-A65C-318E6AD132A1}" type="slidenum">
+            <a:fld id="{39590CA2-DE43-4DA8-9AE7-26820A8627FA}" type="slidenum">
               <a:rPr lang="en-US"/>
               <a:t>‹#›</a:t>
             </a:fld>
@@ -7136,7 +7136,7 @@
           <a:bodyPr/>
           <a:lstStyle/>
           <a:p>
-            <a:fld id="{B8AC4DAF-57BE-4CA5-887C-005EA1CBE213}" type="slidenum">
+            <a:fld id="{0A384BD0-2B60-4444-8786-D25F85230D6E}" type="slidenum">
               <a:rPr lang="en-US"/>
               <a:t>‹#›</a:t>
             </a:fld>
@@ -8200,7 +8200,7 @@
           <a:bodyPr/>
           <a:lstStyle/>
           <a:p>
-            <a:fld id="{7615E191-C12E-4142-99DC-C2F9CDC71B35}" type="slidenum">
+            <a:fld id="{4A274F61-B26A-4E0B-8AE3-A24775374DEE}" type="slidenum">
               <a:rPr lang="en-US"/>
               <a:t>‹#›</a:t>
             </a:fld>
